--- a/docs/MILESTONE4/SRE_Milestone4_Mid-term.pptx
+++ b/docs/MILESTONE4/SRE_Milestone4_Mid-term.pptx
@@ -6624,7 +6624,7 @@
         <p:spPr>
           <a:xfrm>
             <a:off x="8311896" y="4114800"/>
-            <a:ext cx="2953512" cy="245745"/>
+            <a:ext cx="2953512" cy="276860"/>
           </a:xfrm>
           <a:prstGeom prst="rect">
             <a:avLst/>
@@ -6643,7 +6643,7 @@
               </a:lnSpc>
             </a:pPr>
             <a:r>
-              <a:rPr lang="zh-CN" sz="1600" b="0">
+              <a:rPr lang="zh-CN" b="0">
                 <a:solidFill>
                   <a:srgbClr val="1F2937"/>
                 </a:solidFill>
@@ -6654,7 +6654,7 @@
               <a:t>· </a:t>
             </a:r>
             <a:r>
-              <a:rPr lang="zh-CN" sz="1600">
+              <a:rPr lang="zh-CN">
                 <a:solidFill>
                   <a:srgbClr val="1F2937"/>
                 </a:solidFill>
@@ -6665,7 +6665,7 @@
               </a:rPr>
               <a:t>角色扮演长线对话</a:t>
             </a:r>
-            <a:endParaRPr lang="zh-CN" sz="1600">
+            <a:endParaRPr lang="zh-CN">
               <a:solidFill>
                 <a:srgbClr val="1F2937"/>
               </a:solidFill>
